--- a/Obszar testowy/Awaryjność/Metodologia.pptx
+++ b/Obszar testowy/Awaryjność/Metodologia.pptx
@@ -818,7 +818,7 @@
 <file path=ppt/charts/chart1.xml><?xml version="1.0" encoding="utf-8"?>
 <c:chartSpace xmlns:c="http://schemas.openxmlformats.org/drawingml/2006/chart" xmlns:a="http://schemas.openxmlformats.org/drawingml/2006/main" xmlns:r="http://schemas.openxmlformats.org/officeDocument/2006/relationships" xmlns:c16r2="http://schemas.microsoft.com/office/drawing/2015/06/chart">
   <c:date1904 val="0"/>
-  <c:lang val="en-US"/>
+  <c:lang val="pl-PL"/>
   <c:roundedCorners val="0"/>
   <mc:AlternateContent xmlns:mc="http://schemas.openxmlformats.org/markup-compatibility/2006">
     <mc:Choice xmlns:c14="http://schemas.microsoft.com/office/drawing/2007/8/2/chart" Requires="c14">
@@ -1230,7 +1230,7 @@
 <file path=ppt/charts/chart2.xml><?xml version="1.0" encoding="utf-8"?>
 <c:chartSpace xmlns:c="http://schemas.openxmlformats.org/drawingml/2006/chart" xmlns:a="http://schemas.openxmlformats.org/drawingml/2006/main" xmlns:r="http://schemas.openxmlformats.org/officeDocument/2006/relationships" xmlns:c16r2="http://schemas.microsoft.com/office/drawing/2015/06/chart">
   <c:date1904 val="0"/>
-  <c:lang val="en-US"/>
+  <c:lang val="pl-PL"/>
   <c:roundedCorners val="0"/>
   <mc:AlternateContent xmlns:mc="http://schemas.openxmlformats.org/markup-compatibility/2006">
     <mc:Choice xmlns:c14="http://schemas.microsoft.com/office/drawing/2007/8/2/chart" Requires="c14">
@@ -2809,7 +2809,7 @@
             <a:pPr rtl="0"/>
             <a:fld id="{7DE69B67-9CAE-40C0-AE11-72E7B8F16173}" type="datetime1">
               <a:rPr lang="pl-PL" smtClean="0"/>
-              <a:t>06.08.2025</a:t>
+              <a:t>18.08.2025</a:t>
             </a:fld>
             <a:endParaRPr lang="pl-PL"/>
           </a:p>
@@ -2991,7 +2991,7 @@
             <a:pPr rtl="0"/>
             <a:fld id="{F8D7D653-09B5-4A44-B3B4-A2CC0382B823}" type="datetime1">
               <a:rPr lang="pl-PL" noProof="0" smtClean="0"/>
-              <a:t>06.08.2025</a:t>
+              <a:t>18.08.2025</a:t>
             </a:fld>
             <a:endParaRPr lang="pl-PL" noProof="0"/>
           </a:p>
@@ -17659,7 +17659,7 @@
         </p:nvSpPr>
         <p:spPr>
           <a:xfrm>
-            <a:off x="714448" y="1758050"/>
+            <a:off x="701748" y="1758050"/>
             <a:ext cx="10975528" cy="1569660"/>
           </a:xfrm>
           <a:prstGeom prst="rect">
@@ -18927,15 +18927,6 @@
 </file>
 
 <file path=customXml/item1.xml><?xml version="1.0" encoding="utf-8"?>
-<?mso-contentType ?>
-<FormTemplates xmlns="http://schemas.microsoft.com/sharepoint/v3/contenttype/forms">
-  <Display>DocumentLibraryForm</Display>
-  <Edit>DocumentLibraryForm</Edit>
-  <New>DocumentLibraryForm</New>
-</FormTemplates>
-</file>
-
-<file path=customXml/item2.xml><?xml version="1.0" encoding="utf-8"?>
 <ct:contentTypeSchema xmlns:ct="http://schemas.microsoft.com/office/2006/metadata/contentType" xmlns:ma="http://schemas.microsoft.com/office/2006/metadata/properties/metaAttributes" ct:_="" ma:_="" ma:contentTypeName="Dokument" ma:contentTypeID="0x01010053AB71B891A2544DBD445D04ABE7886B" ma:contentTypeVersion="11" ma:contentTypeDescription="Utwórz nowy dokument." ma:contentTypeScope="" ma:versionID="323ef943dc9fb95ca33ee9e1c20c1484">
   <xsd:schema xmlns:xsd="http://www.w3.org/2001/XMLSchema" xmlns:xs="http://www.w3.org/2001/XMLSchema" xmlns:p="http://schemas.microsoft.com/office/2006/metadata/properties" xmlns:ns2="0d6c5dbd-25b1-4fbf-83f9-b289d7b111a0" xmlns:ns3="3fec9504-7640-4451-840c-8d09d21130e6" targetNamespace="http://schemas.microsoft.com/office/2006/metadata/properties" ma:root="true" ma:fieldsID="fa2476893f5436c76bf320e2ff6b1281" ns2:_="" ns3:_="">
     <xsd:import namespace="0d6c5dbd-25b1-4fbf-83f9-b289d7b111a0"/>
@@ -19130,6 +19121,15 @@
 </ct:contentTypeSchema>
 </file>
 
+<file path=customXml/item2.xml><?xml version="1.0" encoding="utf-8"?>
+<?mso-contentType ?>
+<FormTemplates xmlns="http://schemas.microsoft.com/sharepoint/v3/contenttype/forms">
+  <Display>DocumentLibraryForm</Display>
+  <Edit>DocumentLibraryForm</Edit>
+  <New>DocumentLibraryForm</New>
+</FormTemplates>
+</file>
+
 <file path=customXml/item3.xml><?xml version="1.0" encoding="utf-8"?>
 <p:properties xmlns:p="http://schemas.microsoft.com/office/2006/metadata/properties" xmlns:xsi="http://www.w3.org/2001/XMLSchema-instance" xmlns:pc="http://schemas.microsoft.com/office/infopath/2007/PartnerControls">
   <documentManagement>
@@ -19142,15 +19142,30 @@
 </file>
 
 <file path=customXml/itemProps1.xml><?xml version="1.0" encoding="utf-8"?>
+<ds:datastoreItem xmlns:ds="http://schemas.openxmlformats.org/officeDocument/2006/customXml" ds:itemID="{6B625D45-EDE9-4ED8-9FCC-B42C9553B5AC}">
+  <ds:schemaRefs>
+    <ds:schemaRef ds:uri="http://schemas.microsoft.com/office/2006/metadata/contentType"/>
+    <ds:schemaRef ds:uri="http://schemas.microsoft.com/office/2006/metadata/properties/metaAttributes"/>
+    <ds:schemaRef ds:uri="http://www.w3.org/2001/XMLSchema"/>
+    <ds:schemaRef ds:uri="http://schemas.microsoft.com/office/2006/metadata/properties"/>
+    <ds:schemaRef ds:uri="0d6c5dbd-25b1-4fbf-83f9-b289d7b111a0"/>
+    <ds:schemaRef ds:uri="3fec9504-7640-4451-840c-8d09d21130e6"/>
+    <ds:schemaRef ds:uri="http://schemas.microsoft.com/office/2006/documentManagement/types"/>
+    <ds:schemaRef ds:uri="http://schemas.microsoft.com/office/infopath/2007/PartnerControls"/>
+    <ds:schemaRef ds:uri="http://schemas.openxmlformats.org/package/2006/metadata/core-properties"/>
+    <ds:schemaRef ds:uri="http://purl.org/dc/elements/1.1/"/>
+    <ds:schemaRef ds:uri="http://purl.org/dc/terms/"/>
+    <ds:schemaRef ds:uri="http://schemas.microsoft.com/internal/obd"/>
+  </ds:schemaRefs>
+</ds:datastoreItem>
+</file>
+
+<file path=customXml/itemProps2.xml><?xml version="1.0" encoding="utf-8"?>
 <ds:datastoreItem xmlns:ds="http://schemas.openxmlformats.org/officeDocument/2006/customXml" ds:itemID="{1B7E2D32-4FDD-4266-880C-17595B801432}">
   <ds:schemaRefs>
     <ds:schemaRef ds:uri="http://schemas.microsoft.com/sharepoint/v3/contenttype/forms"/>
   </ds:schemaRefs>
 </ds:datastoreItem>
-</file>
-
-<file path=customXml/itemProps2.xml><?xml version="1.0" encoding="utf-8"?>
-<ds:datastoreItem xmlns:ds="http://schemas.openxmlformats.org/officeDocument/2006/customXml" ds:itemID="{6B625D45-EDE9-4ED8-9FCC-B42C9553B5AC}"/>
 </file>
 
 <file path=customXml/itemProps3.xml><?xml version="1.0" encoding="utf-8"?>
